--- a/AI_for_Finance_Course/Slides/Class_05_Operational_Risk_Fraud_Detection.pptx
+++ b/AI_for_Finance_Course/Slides/Class_05_Operational_Risk_Fraud_Detection.pptx
@@ -500,6 +500,10 @@
           </p:nvPr>
         </p:nvSpPr>
         <p:spPr/>
+        <p:txBody>
+          <a:bodyPr/>
+          <a:p/>
+        </p:txBody>
       </p:sp>
       <p:sp>
         <p:nvSpPr>
@@ -588,6 +592,10 @@
           </p:nvPr>
         </p:nvSpPr>
         <p:spPr/>
+        <p:txBody>
+          <a:bodyPr/>
+          <a:p/>
+        </p:txBody>
       </p:sp>
       <p:sp>
         <p:nvSpPr>
@@ -676,6 +684,10 @@
           </p:nvPr>
         </p:nvSpPr>
         <p:spPr/>
+        <p:txBody>
+          <a:bodyPr/>
+          <a:p/>
+        </p:txBody>
       </p:sp>
       <p:sp>
         <p:nvSpPr>
@@ -764,6 +776,10 @@
           </p:nvPr>
         </p:nvSpPr>
         <p:spPr/>
+        <p:txBody>
+          <a:bodyPr/>
+          <a:p/>
+        </p:txBody>
       </p:sp>
       <p:sp>
         <p:nvSpPr>
@@ -852,6 +868,10 @@
           </p:nvPr>
         </p:nvSpPr>
         <p:spPr/>
+        <p:txBody>
+          <a:bodyPr/>
+          <a:p/>
+        </p:txBody>
       </p:sp>
       <p:sp>
         <p:nvSpPr>
@@ -940,6 +960,10 @@
           </p:nvPr>
         </p:nvSpPr>
         <p:spPr/>
+        <p:txBody>
+          <a:bodyPr/>
+          <a:p/>
+        </p:txBody>
       </p:sp>
       <p:sp>
         <p:nvSpPr>
@@ -1028,6 +1052,10 @@
           </p:nvPr>
         </p:nvSpPr>
         <p:spPr/>
+        <p:txBody>
+          <a:bodyPr/>
+          <a:p/>
+        </p:txBody>
       </p:sp>
       <p:sp>
         <p:nvSpPr>
@@ -1116,6 +1144,10 @@
           </p:nvPr>
         </p:nvSpPr>
         <p:spPr/>
+        <p:txBody>
+          <a:bodyPr/>
+          <a:p/>
+        </p:txBody>
       </p:sp>
       <p:sp>
         <p:nvSpPr>
@@ -1204,6 +1236,10 @@
           </p:nvPr>
         </p:nvSpPr>
         <p:spPr/>
+        <p:txBody>
+          <a:bodyPr/>
+          <a:p/>
+        </p:txBody>
       </p:sp>
       <p:sp>
         <p:nvSpPr>
@@ -1292,6 +1328,10 @@
           </p:nvPr>
         </p:nvSpPr>
         <p:spPr/>
+        <p:txBody>
+          <a:bodyPr/>
+          <a:p/>
+        </p:txBody>
       </p:sp>
       <p:sp>
         <p:nvSpPr>
@@ -1380,6 +1420,10 @@
           </p:nvPr>
         </p:nvSpPr>
         <p:spPr/>
+        <p:txBody>
+          <a:bodyPr/>
+          <a:p/>
+        </p:txBody>
       </p:sp>
       <p:sp>
         <p:nvSpPr>
@@ -1468,6 +1512,10 @@
           </p:nvPr>
         </p:nvSpPr>
         <p:spPr/>
+        <p:txBody>
+          <a:bodyPr/>
+          <a:p/>
+        </p:txBody>
       </p:sp>
       <p:sp>
         <p:nvSpPr>
@@ -1556,6 +1604,10 @@
           </p:nvPr>
         </p:nvSpPr>
         <p:spPr/>
+        <p:txBody>
+          <a:bodyPr/>
+          <a:p/>
+        </p:txBody>
       </p:sp>
       <p:sp>
         <p:nvSpPr>
@@ -1644,6 +1696,10 @@
           </p:nvPr>
         </p:nvSpPr>
         <p:spPr/>
+        <p:txBody>
+          <a:bodyPr/>
+          <a:p/>
+        </p:txBody>
       </p:sp>
       <p:sp>
         <p:nvSpPr>
@@ -1732,6 +1788,10 @@
           </p:nvPr>
         </p:nvSpPr>
         <p:spPr/>
+        <p:txBody>
+          <a:bodyPr/>
+          <a:p/>
+        </p:txBody>
       </p:sp>
       <p:sp>
         <p:nvSpPr>
@@ -1820,6 +1880,10 @@
           </p:nvPr>
         </p:nvSpPr>
         <p:spPr/>
+        <p:txBody>
+          <a:bodyPr/>
+          <a:p/>
+        </p:txBody>
       </p:sp>
       <p:sp>
         <p:nvSpPr>
@@ -1908,6 +1972,10 @@
           </p:nvPr>
         </p:nvSpPr>
         <p:spPr/>
+        <p:txBody>
+          <a:bodyPr/>
+          <a:p/>
+        </p:txBody>
       </p:sp>
       <p:sp>
         <p:nvSpPr>
@@ -2474,6 +2542,10 @@
           </a:solidFill>
           <a:ln/>
         </p:spPr>
+        <p:txBody>
+          <a:bodyPr/>
+          <a:p/>
+        </p:txBody>
       </p:sp>
     </p:spTree>
   </p:cSld>
@@ -2526,6 +2598,10 @@
           </a:solidFill>
           <a:ln/>
         </p:spPr>
+        <p:txBody>
+          <a:bodyPr/>
+          <a:p/>
+        </p:txBody>
       </p:sp>
       <p:sp>
         <p:nvSpPr>
@@ -2790,6 +2866,10 @@
             <a:prstDash val="solid"/>
           </a:ln>
         </p:spPr>
+        <p:txBody>
+          <a:bodyPr/>
+          <a:p/>
+        </p:txBody>
       </p:sp>
       <p:sp>
         <p:nvSpPr>
@@ -2994,6 +3074,10 @@
           </a:solidFill>
           <a:ln/>
         </p:spPr>
+        <p:txBody>
+          <a:bodyPr/>
+          <a:p/>
+        </p:txBody>
       </p:sp>
       <p:sp>
         <p:nvSpPr>
@@ -3324,6 +3408,10 @@
           </a:solidFill>
           <a:ln/>
         </p:spPr>
+        <p:txBody>
+          <a:bodyPr/>
+          <a:p/>
+        </p:txBody>
       </p:sp>
       <p:sp>
         <p:nvSpPr>
@@ -3654,6 +3742,10 @@
           </a:solidFill>
           <a:ln/>
         </p:spPr>
+        <p:txBody>
+          <a:bodyPr/>
+          <a:p/>
+        </p:txBody>
       </p:sp>
       <p:sp>
         <p:nvSpPr>
@@ -4024,6 +4116,10 @@
           </a:solidFill>
           <a:ln/>
         </p:spPr>
+        <p:txBody>
+          <a:bodyPr/>
+          <a:p/>
+        </p:txBody>
       </p:sp>
       <p:sp>
         <p:nvSpPr>
@@ -4354,6 +4450,10 @@
           </a:solidFill>
           <a:ln/>
         </p:spPr>
+        <p:txBody>
+          <a:bodyPr/>
+          <a:p/>
+        </p:txBody>
       </p:sp>
       <p:sp>
         <p:nvSpPr>
@@ -4684,6 +4784,10 @@
           </a:solidFill>
           <a:ln/>
         </p:spPr>
+        <p:txBody>
+          <a:bodyPr/>
+          <a:p/>
+        </p:txBody>
       </p:sp>
       <p:sp>
         <p:nvSpPr>
@@ -5027,7 +5131,7 @@
                 <a:ea typeface="Calibri" pitchFamily="34" charset="-122"/>
                 <a:cs typeface="Calibri" pitchFamily="34" charset="-120"/>
               </a:rPr>
-              <a:t>Proxiant Academy — www.proxiant.com</a:t>
+              <a:t>Proxiant Academy | proxiant.ai</a:t>
             </a:r>
             <a:endParaRPr lang="en-US" sz="1400" dirty="0"/>
           </a:p>
@@ -5123,6 +5227,10 @@
           </a:solidFill>
           <a:ln/>
         </p:spPr>
+        <p:txBody>
+          <a:bodyPr/>
+          <a:p/>
+        </p:txBody>
       </p:sp>
       <p:sp>
         <p:nvSpPr>
@@ -5182,6 +5290,10 @@
           </a:solidFill>
           <a:ln/>
         </p:spPr>
+        <p:txBody>
+          <a:bodyPr/>
+          <a:p/>
+        </p:txBody>
       </p:sp>
       <p:sp>
         <p:nvSpPr>
@@ -5280,6 +5392,10 @@
           </a:solidFill>
           <a:ln/>
         </p:spPr>
+        <p:txBody>
+          <a:bodyPr/>
+          <a:p/>
+        </p:txBody>
       </p:sp>
       <p:sp>
         <p:nvSpPr>
@@ -5378,6 +5494,10 @@
           </a:solidFill>
           <a:ln/>
         </p:spPr>
+        <p:txBody>
+          <a:bodyPr/>
+          <a:p/>
+        </p:txBody>
       </p:sp>
       <p:sp>
         <p:nvSpPr>
@@ -5476,6 +5596,10 @@
           </a:solidFill>
           <a:ln/>
         </p:spPr>
+        <p:txBody>
+          <a:bodyPr/>
+          <a:p/>
+        </p:txBody>
       </p:sp>
       <p:sp>
         <p:nvSpPr>
@@ -5574,6 +5698,10 @@
           </a:solidFill>
           <a:ln/>
         </p:spPr>
+        <p:txBody>
+          <a:bodyPr/>
+          <a:p/>
+        </p:txBody>
       </p:sp>
       <p:sp>
         <p:nvSpPr>
@@ -5743,6 +5871,10 @@
           </a:solidFill>
           <a:ln/>
         </p:spPr>
+        <p:txBody>
+          <a:bodyPr/>
+          <a:p/>
+        </p:txBody>
       </p:sp>
       <p:sp>
         <p:nvSpPr>
@@ -6071,6 +6203,10 @@
           </a:solidFill>
           <a:ln/>
         </p:spPr>
+        <p:txBody>
+          <a:bodyPr/>
+          <a:p/>
+        </p:txBody>
       </p:sp>
       <p:sp>
         <p:nvSpPr>
@@ -6265,7 +6401,7 @@
                 <a:ea typeface="Calibri" pitchFamily="34" charset="-122"/>
                 <a:cs typeface="Calibri" pitchFamily="34" charset="-120"/>
               </a:rPr>
-              <a:t>O(n log n) complexity — excellent for large datasets</a:t>
+              <a:t>O(n log n) complexity, excellent for large datasets</a:t>
             </a:r>
             <a:endParaRPr lang="en-US" sz="1200" dirty="0"/>
           </a:p>
@@ -6335,6 +6471,10 @@
             <a:prstDash val="solid"/>
           </a:ln>
         </p:spPr>
+        <p:txBody>
+          <a:bodyPr/>
+          <a:p/>
+        </p:txBody>
       </p:sp>
       <p:sp>
         <p:nvSpPr>
@@ -6511,6 +6651,10 @@
           </a:solidFill>
           <a:ln/>
         </p:spPr>
+        <p:txBody>
+          <a:bodyPr/>
+          <a:p/>
+        </p:txBody>
       </p:sp>
       <p:sp>
         <p:nvSpPr>
@@ -6840,6 +6984,10 @@
           </a:solidFill>
           <a:ln/>
         </p:spPr>
+        <p:txBody>
+          <a:bodyPr/>
+          <a:p/>
+        </p:txBody>
       </p:sp>
       <p:sp>
         <p:nvSpPr>
@@ -7170,6 +7318,10 @@
           </a:solidFill>
           <a:ln/>
         </p:spPr>
+        <p:txBody>
+          <a:bodyPr/>
+          <a:p/>
+        </p:txBody>
       </p:sp>
       <p:sp>
         <p:nvSpPr>
@@ -7540,6 +7692,10 @@
           </a:solidFill>
           <a:ln/>
         </p:spPr>
+        <p:txBody>
+          <a:bodyPr/>
+          <a:p/>
+        </p:txBody>
       </p:sp>
       <p:sp>
         <p:nvSpPr>
@@ -7870,6 +8026,10 @@
           </a:solidFill>
           <a:ln/>
         </p:spPr>
+        <p:txBody>
+          <a:bodyPr/>
+          <a:p/>
+        </p:txBody>
       </p:sp>
       <p:sp>
         <p:nvSpPr>
